--- a/OOP01.pptx
+++ b/OOP01.pptx
@@ -290,7 +290,7 @@
               <a:pPr>
                 <a:defRPr/>
               </a:pPr>
-              <a:t>2026. 9. 1.</a:t>
+              <a:t>2026. 9. 3.</a:t>
             </a:fld>
             <a:endParaRPr lang="ko-KR" altLang="en-US"/>
           </a:p>
@@ -525,7 +525,7 @@
               <a:pPr>
                 <a:defRPr/>
               </a:pPr>
-              <a:t>2026. 9. 1.</a:t>
+              <a:t>2026. 9. 3.</a:t>
             </a:fld>
             <a:endParaRPr lang="ko-KR" altLang="en-US"/>
           </a:p>
@@ -9808,7 +9808,7 @@
             </a:pPr>
             <a:r>
               <a:rPr lang="en-US" altLang="ko-KR" sz="1800" dirty="0"/>
-              <a:t>Deadline : 11:59pm on Sep. 10</a:t>
+              <a:t>Deadline : 11:59pm on Sep. 17</a:t>
             </a:r>
             <a:r>
               <a:rPr lang="en-US" altLang="ko-KR" sz="1800" baseline="30000" dirty="0"/>
@@ -9839,7 +9839,7 @@
             </a:pPr>
             <a:r>
               <a:rPr lang="en-US" altLang="ko-KR" sz="1800" dirty="0"/>
-              <a:t>Expected Team Size : 4, 5, or 6 </a:t>
+              <a:t>Expected Team Size : around 4  </a:t>
             </a:r>
           </a:p>
           <a:p>
@@ -9850,7 +9850,7 @@
             </a:pPr>
             <a:r>
               <a:rPr lang="en-US" altLang="ko-KR" sz="1800" dirty="0"/>
-              <a:t>    (If you want, team size 1, 2, 3 or 7 will be also allowed.</a:t>
+              <a:t>    (If you want, team size 1, 2, 3 or 5 will be also allowed.</a:t>
             </a:r>
           </a:p>
           <a:p>
@@ -11354,7 +11354,7 @@
                   <a:srgbClr val="FF0000"/>
                 </a:solidFill>
               </a:rPr>
-              <a:t>/oop26</a:t>
+              <a:t>/object26</a:t>
             </a:r>
           </a:p>
           <a:p>
